--- a/DATAS/202303 GI Home EDA.pptx
+++ b/DATAS/202303 GI Home EDA.pptx
@@ -122,7 +122,7 @@
   <pc:docChgLst>
     <pc:chgData name="AU Kelvin" userId="416e5d84-3133-4774-aa1a-290e1bef47d6" providerId="ADAL" clId="{BCD78349-6B8D-4133-A47A-CB3E55A6B618}"/>
     <pc:docChg chg="undo custSel addSld delSld modSld">
-      <pc:chgData name="AU Kelvin" userId="416e5d84-3133-4774-aa1a-290e1bef47d6" providerId="ADAL" clId="{BCD78349-6B8D-4133-A47A-CB3E55A6B618}" dt="2023-03-31T07:24:36.409" v="154" actId="20577"/>
+      <pc:chgData name="AU Kelvin" userId="416e5d84-3133-4774-aa1a-290e1bef47d6" providerId="ADAL" clId="{BCD78349-6B8D-4133-A47A-CB3E55A6B618}" dt="2023-03-31T08:24:15.761" v="168" actId="20577"/>
       <pc:docMkLst>
         <pc:docMk/>
       </pc:docMkLst>
@@ -156,7 +156,7 @@
         </pc:sldMkLst>
       </pc:sldChg>
       <pc:sldChg chg="addSp modSp add mod">
-        <pc:chgData name="AU Kelvin" userId="416e5d84-3133-4774-aa1a-290e1bef47d6" providerId="ADAL" clId="{BCD78349-6B8D-4133-A47A-CB3E55A6B618}" dt="2023-03-31T07:02:51.583" v="139" actId="20577"/>
+        <pc:chgData name="AU Kelvin" userId="416e5d84-3133-4774-aa1a-290e1bef47d6" providerId="ADAL" clId="{BCD78349-6B8D-4133-A47A-CB3E55A6B618}" dt="2023-03-31T08:24:15.761" v="168" actId="20577"/>
         <pc:sldMkLst>
           <pc:docMk/>
           <pc:sldMk cId="2799964493" sldId="259"/>
@@ -170,7 +170,7 @@
           </ac:spMkLst>
         </pc:spChg>
         <pc:graphicFrameChg chg="mod modGraphic">
-          <ac:chgData name="AU Kelvin" userId="416e5d84-3133-4774-aa1a-290e1bef47d6" providerId="ADAL" clId="{BCD78349-6B8D-4133-A47A-CB3E55A6B618}" dt="2023-03-31T07:02:51.583" v="139" actId="20577"/>
+          <ac:chgData name="AU Kelvin" userId="416e5d84-3133-4774-aa1a-290e1bef47d6" providerId="ADAL" clId="{BCD78349-6B8D-4133-A47A-CB3E55A6B618}" dt="2023-03-31T08:24:15.761" v="168" actId="20577"/>
           <ac:graphicFrameMkLst>
             <pc:docMk/>
             <pc:sldMk cId="2799964493" sldId="259"/>
@@ -1690,7 +1690,7 @@
             <p:ph sz="quarter" idx="13"/>
             <p:extLst>
               <p:ext uri="{D42A27DB-BD31-4B8C-83A1-F6EECF244321}">
-                <p14:modId xmlns:p14="http://schemas.microsoft.com/office/powerpoint/2010/main" val="3928021298"/>
+                <p14:modId xmlns:p14="http://schemas.microsoft.com/office/powerpoint/2010/main" val="1668949842"/>
               </p:ext>
             </p:extLst>
           </p:nvPr>
@@ -1947,7 +1947,10 @@
                     <a:lstStyle/>
                     <a:p>
                       <a:pPr algn="ctr"/>
-                      <a:endParaRPr lang="en-US" sz="1200"/>
+                      <a:r>
+                        <a:rPr lang="en-US" sz="1200" dirty="0"/>
+                        <a:t>(2017, 2022)</a:t>
+                      </a:r>
                     </a:p>
                   </a:txBody>
                   <a:tcPr anchor="ctr">
@@ -3887,17 +3890,8 @@
               <a:rPr lang="en-US" sz="2150" dirty="0">
                 <a:ea typeface="Source Sans Pro"/>
               </a:rPr>
-              <a:t>Average </a:t>
-            </a:r>
-            <a:r>
-              <a:rPr lang="en-US" sz="2150">
-                <a:ea typeface="Source Sans Pro"/>
-              </a:rPr>
-              <a:t>GWP:</a:t>
-            </a:r>
-            <a:endParaRPr lang="en-US" sz="2150" dirty="0">
-              <a:ea typeface="Source Sans Pro"/>
-            </a:endParaRPr>
+              <a:t>Average GWP:</a:t>
+            </a:r>
           </a:p>
           <a:p>
             <a:pPr marL="405765" indent="-405765">
@@ -4695,13 +4689,13 @@
 </file>
 
 <file path=customXml/itemProps1.xml><?xml version="1.0" encoding="utf-8"?>
-<ds:datastoreItem xmlns:ds="http://schemas.openxmlformats.org/officeDocument/2006/customXml" ds:itemID="{7F601F9F-A11E-4F31-B918-F35E9C4BFE2D}"/>
+<ds:datastoreItem xmlns:ds="http://schemas.openxmlformats.org/officeDocument/2006/customXml" ds:itemID="{3754405B-001E-4BC8-AC12-208B8393BC1E}"/>
 </file>
 
 <file path=customXml/itemProps2.xml><?xml version="1.0" encoding="utf-8"?>
-<ds:datastoreItem xmlns:ds="http://schemas.openxmlformats.org/officeDocument/2006/customXml" ds:itemID="{A11D50E6-23CA-45C0-BDEA-8298D1940AED}"/>
+<ds:datastoreItem xmlns:ds="http://schemas.openxmlformats.org/officeDocument/2006/customXml" ds:itemID="{932957E9-ADE6-4E97-BC05-C22F8B24E637}"/>
 </file>
 
 <file path=customXml/itemProps3.xml><?xml version="1.0" encoding="utf-8"?>
-<ds:datastoreItem xmlns:ds="http://schemas.openxmlformats.org/officeDocument/2006/customXml" ds:itemID="{E99CF665-994E-400A-83E2-F71DE30A4BA9}"/>
+<ds:datastoreItem xmlns:ds="http://schemas.openxmlformats.org/officeDocument/2006/customXml" ds:itemID="{6812DF9F-602C-4BB4-A9B8-7CFA22D0E7CE}"/>
 </file>